--- a/EMART/이마트에브리데이_사업제안서_v2_260301.pptx
+++ b/EMART/이마트에브리데이_사업제안서_v2_260301.pptx
@@ -372,7 +372,7 @@
         <c:spPr>
           <a:ln w="12700" cap="flat">
             <a:solidFill>
-              <a:srgbClr val="FFFFFF"/>
+              <a:srgbClr val="888888"/>
             </a:solidFill>
             <a:prstDash val="solid"/>
             <a:round/>
@@ -430,7 +430,7 @@
         <c:spPr>
           <a:ln w="12700" cap="flat">
             <a:solidFill>
-              <a:srgbClr val="FFFFFF"/>
+              <a:srgbClr val="888888"/>
             </a:solidFill>
             <a:prstDash val="solid"/>
             <a:round/>
@@ -2982,7 +2982,7 @@
             <a:r>
               <a:rPr lang="en-US" sz="1000">
                 <a:solidFill>
-                  <a:srgbClr val="151515"/>
+                  <a:srgbClr val="FFFFFF"/>
                 </a:solidFill>
               </a:rPr>
               <a:t>제안사명</a:t>
@@ -3019,7 +3019,7 @@
             <a:r>
               <a:rPr lang="en-US" sz="1000">
                 <a:solidFill>
-                  <a:srgbClr val="151515"/>
+                  <a:srgbClr val="FFFFFF"/>
                 </a:solidFill>
               </a:rPr>
               <a:t>제안일: 2026-03-01</a:t>
@@ -3056,7 +3056,7 @@
             <a:r>
               <a:rPr lang="en-US" sz="1000">
                 <a:solidFill>
-                  <a:srgbClr val="151515"/>
+                  <a:srgbClr val="FFFFFF"/>
                 </a:solidFill>
               </a:rPr>
               <a:t>담당자 연락처: 010-0000-0000</a:t>
@@ -3161,7 +3161,7 @@
         </p:nvSpPr>
         <p:spPr>
           <a:xfrm>
-            <a:off x="274320" y="228600"/>
+            <a:off x="182880" y="182880"/>
             <a:ext cx="4572000" cy="274320"/>
           </a:xfrm>
           <a:prstGeom prst="rect">
@@ -3195,7 +3195,7 @@
         </p:nvSpPr>
         <p:spPr>
           <a:xfrm>
-            <a:off x="7772400" y="228600"/>
+            <a:off x="7772400" y="182880"/>
             <a:ext cx="1097280" cy="274320"/>
           </a:xfrm>
           <a:prstGeom prst="rect">
@@ -3275,50 +3275,6 @@
           <a:xfrm>
             <a:off x="0" y="5006340"/>
             <a:ext cx="9144000" cy="137160"/>
-          </a:xfrm>
-          <a:prstGeom prst="rect">
-            <a:avLst/>
-          </a:prstGeom>
-          <a:solidFill>
-            <a:srgbClr val="FFD200"/>
-          </a:solidFill>
-          <a:ln>
-            <a:noFill/>
-          </a:ln>
-          <a:effectLst/>
-        </p:spPr>
-        <p:style>
-          <a:lnRef idx="1">
-            <a:schemeClr val="accent1"/>
-          </a:lnRef>
-          <a:fillRef idx="3">
-            <a:schemeClr val="accent1"/>
-          </a:fillRef>
-          <a:effectRef idx="2">
-            <a:schemeClr val="accent1"/>
-          </a:effectRef>
-          <a:fontRef idx="minor">
-            <a:schemeClr val="lt1"/>
-          </a:fontRef>
-        </p:style>
-        <p:txBody>
-          <a:bodyPr rtlCol="0" anchor="ctr"/>
-          <a:lstStyle/>
-          <a:p>
-            <a:pPr algn="ctr"/>
-          </a:p>
-        </p:txBody>
-      </p:sp>
-      <p:sp>
-        <p:nvSpPr>
-          <p:cNvPr id="14" name="Rectangle 13"/>
-          <p:cNvSpPr/>
-          <p:nvPr/>
-        </p:nvSpPr>
-        <p:spPr>
-          <a:xfrm>
-            <a:off x="0" y="914400"/>
-            <a:ext cx="365760" cy="3200400"/>
           </a:xfrm>
           <a:prstGeom prst="rect">
             <a:avLst/>
@@ -3564,7 +3520,7 @@
             <a:r>
               <a:rPr lang="en-US" sz="1600" b="1">
                 <a:solidFill>
-                  <a:srgbClr val="FFFFFF"/>
+                  <a:srgbClr val="151515"/>
                 </a:solidFill>
                 <a:latin typeface="LG Smart UI Bold"/>
                 <a:ea typeface="LG Smart UI Bold"/>
@@ -3749,7 +3705,7 @@
             <a:r>
               <a:rPr lang="en-US" sz="1600" b="1">
                 <a:solidFill>
-                  <a:srgbClr val="FFFFFF"/>
+                  <a:srgbClr val="151515"/>
                 </a:solidFill>
                 <a:latin typeface="LG Smart UI Bold"/>
                 <a:ea typeface="LG Smart UI Bold"/>
@@ -3934,7 +3890,7 @@
             <a:r>
               <a:rPr lang="en-US" sz="1600" b="1">
                 <a:solidFill>
-                  <a:srgbClr val="FFFFFF"/>
+                  <a:srgbClr val="151515"/>
                 </a:solidFill>
                 <a:latin typeface="LG Smart UI Bold"/>
                 <a:ea typeface="LG Smart UI Bold"/>
@@ -4119,7 +4075,7 @@
             <a:r>
               <a:rPr lang="en-US" sz="1600" b="1">
                 <a:solidFill>
-                  <a:srgbClr val="FFFFFF"/>
+                  <a:srgbClr val="151515"/>
                 </a:solidFill>
                 <a:latin typeface="LG Smart UI Bold"/>
                 <a:ea typeface="LG Smart UI Bold"/>
@@ -4271,7 +4227,7 @@
         </p:nvSpPr>
         <p:spPr>
           <a:xfrm>
-            <a:off x="274320" y="228600"/>
+            <a:off x="182880" y="182880"/>
             <a:ext cx="4572000" cy="274320"/>
           </a:xfrm>
           <a:prstGeom prst="rect">
@@ -4305,7 +4261,7 @@
         </p:nvSpPr>
         <p:spPr>
           <a:xfrm>
-            <a:off x="7772400" y="228600"/>
+            <a:off x="7772400" y="182880"/>
             <a:ext cx="1097280" cy="274320"/>
           </a:xfrm>
           <a:prstGeom prst="rect">
@@ -4542,7 +4498,7 @@
             <a:r>
               <a:rPr lang="en-US" sz="1200">
                 <a:solidFill>
-                  <a:srgbClr val="FFFFFF"/>
+                  <a:srgbClr val="151515"/>
                 </a:solidFill>
                 <a:latin typeface="LG Smart UI Bold"/>
                 <a:ea typeface="LG Smart UI Bold"/>
@@ -4725,7 +4681,7 @@
             <a:r>
               <a:rPr lang="en-US" sz="1200">
                 <a:solidFill>
-                  <a:srgbClr val="FFFFFF"/>
+                  <a:srgbClr val="151515"/>
                 </a:solidFill>
                 <a:latin typeface="LG Smart UI Bold"/>
                 <a:ea typeface="LG Smart UI Bold"/>
@@ -4908,7 +4864,7 @@
             <a:r>
               <a:rPr lang="en-US" sz="1200">
                 <a:solidFill>
-                  <a:srgbClr val="FFFFFF"/>
+                  <a:srgbClr val="151515"/>
                 </a:solidFill>
                 <a:latin typeface="LG Smart UI Bold"/>
                 <a:ea typeface="LG Smart UI Bold"/>
@@ -5091,7 +5047,7 @@
             <a:r>
               <a:rPr lang="en-US" sz="1200">
                 <a:solidFill>
-                  <a:srgbClr val="FFFFFF"/>
+                  <a:srgbClr val="151515"/>
                 </a:solidFill>
                 <a:latin typeface="LG Smart UI Bold"/>
                 <a:ea typeface="LG Smart UI Bold"/>
@@ -5282,7 +5238,7 @@
         </p:nvSpPr>
         <p:spPr>
           <a:xfrm>
-            <a:off x="274320" y="228600"/>
+            <a:off x="182880" y="182880"/>
             <a:ext cx="4572000" cy="274320"/>
           </a:xfrm>
           <a:prstGeom prst="rect">
@@ -5316,7 +5272,7 @@
         </p:nvSpPr>
         <p:spPr>
           <a:xfrm>
-            <a:off x="7772400" y="228600"/>
+            <a:off x="7772400" y="182880"/>
             <a:ext cx="1097280" cy="274320"/>
           </a:xfrm>
           <a:prstGeom prst="rect">
@@ -5553,7 +5509,7 @@
             <a:r>
               <a:rPr lang="en-US" sz="1600" b="1">
                 <a:solidFill>
-                  <a:srgbClr val="FFFFFF"/>
+                  <a:srgbClr val="151515"/>
                 </a:solidFill>
                 <a:latin typeface="LG Smart UI Bold"/>
                 <a:ea typeface="LG Smart UI Bold"/>
@@ -5738,7 +5694,7 @@
             <a:r>
               <a:rPr lang="en-US" sz="1600" b="1">
                 <a:solidFill>
-                  <a:srgbClr val="FFFFFF"/>
+                  <a:srgbClr val="151515"/>
                 </a:solidFill>
                 <a:latin typeface="LG Smart UI Bold"/>
                 <a:ea typeface="LG Smart UI Bold"/>
@@ -5923,7 +5879,7 @@
             <a:r>
               <a:rPr lang="en-US" sz="1600" b="1">
                 <a:solidFill>
-                  <a:srgbClr val="FFFFFF"/>
+                  <a:srgbClr val="151515"/>
                 </a:solidFill>
                 <a:latin typeface="LG Smart UI Bold"/>
                 <a:ea typeface="LG Smart UI Bold"/>
@@ -6108,7 +6064,7 @@
             <a:r>
               <a:rPr lang="en-US" sz="1600" b="1">
                 <a:solidFill>
-                  <a:srgbClr val="FFFFFF"/>
+                  <a:srgbClr val="151515"/>
                 </a:solidFill>
                 <a:latin typeface="LG Smart UI Bold"/>
                 <a:ea typeface="LG Smart UI Bold"/>
@@ -6293,7 +6249,7 @@
             <a:r>
               <a:rPr lang="en-US" sz="1600" b="1">
                 <a:solidFill>
-                  <a:srgbClr val="FFFFFF"/>
+                  <a:srgbClr val="151515"/>
                 </a:solidFill>
                 <a:latin typeface="LG Smart UI Bold"/>
                 <a:ea typeface="LG Smart UI Bold"/>
@@ -6445,7 +6401,7 @@
         </p:nvSpPr>
         <p:spPr>
           <a:xfrm>
-            <a:off x="274320" y="228600"/>
+            <a:off x="182880" y="182880"/>
             <a:ext cx="4572000" cy="274320"/>
           </a:xfrm>
           <a:prstGeom prst="rect">
@@ -6479,7 +6435,7 @@
         </p:nvSpPr>
         <p:spPr>
           <a:xfrm>
-            <a:off x="7772400" y="228600"/>
+            <a:off x="7772400" y="182880"/>
             <a:ext cx="1097280" cy="274320"/>
           </a:xfrm>
           <a:prstGeom prst="rect">
@@ -6716,7 +6672,7 @@
             <a:r>
               <a:rPr lang="en-US" sz="1600" b="1">
                 <a:solidFill>
-                  <a:srgbClr val="FFFFFF"/>
+                  <a:srgbClr val="151515"/>
                 </a:solidFill>
                 <a:latin typeface="LG Smart UI Bold"/>
                 <a:ea typeface="LG Smart UI Bold"/>
@@ -6901,7 +6857,7 @@
             <a:r>
               <a:rPr lang="en-US" sz="1600" b="1">
                 <a:solidFill>
-                  <a:srgbClr val="FFFFFF"/>
+                  <a:srgbClr val="151515"/>
                 </a:solidFill>
                 <a:latin typeface="LG Smart UI Bold"/>
                 <a:ea typeface="LG Smart UI Bold"/>
@@ -7086,7 +7042,7 @@
             <a:r>
               <a:rPr lang="en-US" sz="1600" b="1">
                 <a:solidFill>
-                  <a:srgbClr val="FFFFFF"/>
+                  <a:srgbClr val="151515"/>
                 </a:solidFill>
                 <a:latin typeface="LG Smart UI Bold"/>
                 <a:ea typeface="LG Smart UI Bold"/>
@@ -7271,7 +7227,7 @@
             <a:r>
               <a:rPr lang="en-US" sz="1600" b="1">
                 <a:solidFill>
-                  <a:srgbClr val="FFFFFF"/>
+                  <a:srgbClr val="151515"/>
                 </a:solidFill>
                 <a:latin typeface="LG Smart UI Bold"/>
                 <a:ea typeface="LG Smart UI Bold"/>
@@ -7423,7 +7379,7 @@
         </p:nvSpPr>
         <p:spPr>
           <a:xfrm>
-            <a:off x="274320" y="228600"/>
+            <a:off x="182880" y="182880"/>
             <a:ext cx="4572000" cy="274320"/>
           </a:xfrm>
           <a:prstGeom prst="rect">
@@ -7457,7 +7413,7 @@
         </p:nvSpPr>
         <p:spPr>
           <a:xfrm>
-            <a:off x="7772400" y="228600"/>
+            <a:off x="7772400" y="182880"/>
             <a:ext cx="1097280" cy="274320"/>
           </a:xfrm>
           <a:prstGeom prst="rect">
@@ -7694,7 +7650,7 @@
             <a:r>
               <a:rPr lang="en-US" sz="1200">
                 <a:solidFill>
-                  <a:srgbClr val="FFFFFF"/>
+                  <a:srgbClr val="151515"/>
                 </a:solidFill>
                 <a:latin typeface="LG Smart UI Bold"/>
                 <a:ea typeface="LG Smart UI Bold"/>
@@ -7837,7 +7793,7 @@
             <a:r>
               <a:rPr lang="en-US" sz="1200">
                 <a:solidFill>
-                  <a:srgbClr val="FFFFFF"/>
+                  <a:srgbClr val="151515"/>
                 </a:solidFill>
                 <a:latin typeface="LG Smart UI Bold"/>
                 <a:ea typeface="LG Smart UI Bold"/>
@@ -7980,7 +7936,7 @@
             <a:r>
               <a:rPr lang="en-US" sz="1200">
                 <a:solidFill>
-                  <a:srgbClr val="FFFFFF"/>
+                  <a:srgbClr val="151515"/>
                 </a:solidFill>
                 <a:latin typeface="LG Smart UI Bold"/>
                 <a:ea typeface="LG Smart UI Bold"/>
@@ -8123,7 +8079,7 @@
             <a:r>
               <a:rPr lang="en-US" sz="1200">
                 <a:solidFill>
-                  <a:srgbClr val="FFFFFF"/>
+                  <a:srgbClr val="151515"/>
                 </a:solidFill>
                 <a:latin typeface="LG Smart UI Bold"/>
                 <a:ea typeface="LG Smart UI Bold"/>
@@ -8376,7 +8332,7 @@
         </p:nvSpPr>
         <p:spPr>
           <a:xfrm>
-            <a:off x="274320" y="228600"/>
+            <a:off x="182880" y="182880"/>
             <a:ext cx="4572000" cy="274320"/>
           </a:xfrm>
           <a:prstGeom prst="rect">
@@ -8410,7 +8366,7 @@
         </p:nvSpPr>
         <p:spPr>
           <a:xfrm>
-            <a:off x="7772400" y="228600"/>
+            <a:off x="7772400" y="182880"/>
             <a:ext cx="1097280" cy="274320"/>
           </a:xfrm>
           <a:prstGeom prst="rect">
@@ -8957,7 +8913,7 @@
         </p:nvSpPr>
         <p:spPr>
           <a:xfrm>
-            <a:off x="274320" y="228600"/>
+            <a:off x="182880" y="182880"/>
             <a:ext cx="4572000" cy="274320"/>
           </a:xfrm>
           <a:prstGeom prst="rect">
@@ -8991,7 +8947,7 @@
         </p:nvSpPr>
         <p:spPr>
           <a:xfrm>
-            <a:off x="7772400" y="228600"/>
+            <a:off x="7772400" y="182880"/>
             <a:ext cx="1097280" cy="274320"/>
           </a:xfrm>
           <a:prstGeom prst="rect">
@@ -9663,7 +9619,7 @@
             <a:r>
               <a:rPr lang="en-US" sz="1200">
                 <a:solidFill>
-                  <a:srgbClr val="151515"/>
+                  <a:srgbClr val="FFFFFF"/>
                 </a:solidFill>
                 <a:latin typeface="LG Smart UI Bold"/>
                 <a:ea typeface="LG Smart UI Bold"/>
@@ -9773,7 +9729,7 @@
         </p:nvSpPr>
         <p:spPr>
           <a:xfrm>
-            <a:off x="274320" y="228600"/>
+            <a:off x="182880" y="182880"/>
             <a:ext cx="4572000" cy="274320"/>
           </a:xfrm>
           <a:prstGeom prst="rect">
@@ -9807,7 +9763,7 @@
         </p:nvSpPr>
         <p:spPr>
           <a:xfrm>
-            <a:off x="7772400" y="228600"/>
+            <a:off x="7772400" y="182880"/>
             <a:ext cx="1097280" cy="274320"/>
           </a:xfrm>
           <a:prstGeom prst="rect">
@@ -10177,7 +10133,7 @@
                       <a:r>
                         <a:rPr lang="en-US" sz="1200">
                           <a:solidFill>
-                            <a:srgbClr val="FFFFFF"/>
+                            <a:srgbClr val="151515"/>
                           </a:solidFill>
                         </a:rPr>
                         <a:t>1회 공구 매출</a:t>
@@ -10238,7 +10194,7 @@
                       <a:r>
                         <a:rPr lang="en-US" sz="1200">
                           <a:solidFill>
-                            <a:srgbClr val="FFFFFF"/>
+                            <a:srgbClr val="151515"/>
                           </a:solidFill>
                         </a:rPr>
                         <a:t>1,000만원</a:t>
@@ -10301,7 +10257,7 @@
                       <a:r>
                         <a:rPr lang="en-US" sz="1200">
                           <a:solidFill>
-                            <a:srgbClr val="FFFFFF"/>
+                            <a:srgbClr val="151515"/>
                           </a:solidFill>
                         </a:rPr>
                         <a:t>점포 수수료 (5%)</a:t>
@@ -10362,7 +10318,7 @@
                       <a:r>
                         <a:rPr lang="en-US" sz="1200">
                           <a:solidFill>
-                            <a:srgbClr val="FFFFFF"/>
+                            <a:srgbClr val="151515"/>
                           </a:solidFill>
                         </a:rPr>
                         <a:t>50만원</a:t>
@@ -10623,7 +10579,7 @@
         </p:nvSpPr>
         <p:spPr>
           <a:xfrm>
-            <a:off x="274320" y="228600"/>
+            <a:off x="182880" y="182880"/>
             <a:ext cx="4572000" cy="274320"/>
           </a:xfrm>
           <a:prstGeom prst="rect">
@@ -10657,7 +10613,7 @@
         </p:nvSpPr>
         <p:spPr>
           <a:xfrm>
-            <a:off x="7772400" y="228600"/>
+            <a:off x="7772400" y="182880"/>
             <a:ext cx="1097280" cy="274320"/>
           </a:xfrm>
           <a:prstGeom prst="rect">
@@ -10897,7 +10853,7 @@
             <a:r>
               <a:rPr lang="en-US" sz="1200">
                 <a:solidFill>
-                  <a:srgbClr val="151515"/>
+                  <a:srgbClr val="FFFFFF"/>
                 </a:solidFill>
                 <a:latin typeface="LG Smart UI Bold"/>
                 <a:ea typeface="LG Smart UI Bold"/>
@@ -11043,7 +10999,7 @@
             <a:r>
               <a:rPr lang="en-US" sz="1200">
                 <a:solidFill>
-                  <a:srgbClr val="151515"/>
+                  <a:srgbClr val="FFFFFF"/>
                 </a:solidFill>
                 <a:latin typeface="LG Smart UI Bold"/>
                 <a:ea typeface="LG Smart UI Bold"/>
@@ -11189,7 +11145,7 @@
             <a:r>
               <a:rPr lang="en-US" sz="1200">
                 <a:solidFill>
-                  <a:srgbClr val="151515"/>
+                  <a:srgbClr val="FFFFFF"/>
                 </a:solidFill>
                 <a:latin typeface="LG Smart UI Bold"/>
                 <a:ea typeface="LG Smart UI Bold"/>
@@ -11380,7 +11336,7 @@
         </p:nvSpPr>
         <p:spPr>
           <a:xfrm>
-            <a:off x="274320" y="228600"/>
+            <a:off x="182880" y="182880"/>
             <a:ext cx="4572000" cy="274320"/>
           </a:xfrm>
           <a:prstGeom prst="rect">
@@ -11414,7 +11370,7 @@
         </p:nvSpPr>
         <p:spPr>
           <a:xfrm>
-            <a:off x="7772400" y="228600"/>
+            <a:off x="7772400" y="182880"/>
             <a:ext cx="1097280" cy="274320"/>
           </a:xfrm>
           <a:prstGeom prst="rect">
@@ -11800,7 +11756,7 @@
                       <a:r>
                         <a:rPr lang="en-US" sz="1500" b="1">
                           <a:solidFill>
-                            <a:srgbClr val="000000"/>
+                            <a:srgbClr val="151515"/>
                           </a:solidFill>
                           <a:latin typeface="LG Smart UI Bold"/>
                           <a:ea typeface="LG Smart UI Bold"/>
@@ -11866,7 +11822,7 @@
                       <a:r>
                         <a:rPr lang="en-US" sz="1500">
                           <a:solidFill>
-                            <a:srgbClr val="000000"/>
+                            <a:srgbClr val="151515"/>
                           </a:solidFill>
                           <a:latin typeface="LG Smart UI Bold"/>
                           <a:ea typeface="LG Smart UI Bold"/>
@@ -11932,7 +11888,7 @@
                       <a:r>
                         <a:rPr lang="en-US" sz="1500">
                           <a:solidFill>
-                            <a:srgbClr val="000000"/>
+                            <a:srgbClr val="151515"/>
                           </a:solidFill>
                           <a:latin typeface="LG Smart UI Bold"/>
                           <a:ea typeface="LG Smart UI Bold"/>
@@ -12000,7 +11956,7 @@
                       <a:r>
                         <a:rPr lang="en-US" sz="1500" b="1">
                           <a:solidFill>
-                            <a:srgbClr val="000000"/>
+                            <a:srgbClr val="151515"/>
                           </a:solidFill>
                           <a:latin typeface="LG Smart UI Bold"/>
                           <a:ea typeface="LG Smart UI Bold"/>
@@ -12066,7 +12022,7 @@
                       <a:r>
                         <a:rPr lang="en-US" sz="1500">
                           <a:solidFill>
-                            <a:srgbClr val="000000"/>
+                            <a:srgbClr val="151515"/>
                           </a:solidFill>
                           <a:latin typeface="LG Smart UI Bold"/>
                           <a:ea typeface="LG Smart UI Bold"/>
@@ -12132,7 +12088,7 @@
                       <a:r>
                         <a:rPr lang="en-US" sz="1500">
                           <a:solidFill>
-                            <a:srgbClr val="000000"/>
+                            <a:srgbClr val="151515"/>
                           </a:solidFill>
                           <a:latin typeface="LG Smart UI Bold"/>
                           <a:ea typeface="LG Smart UI Bold"/>
@@ -12200,7 +12156,7 @@
                       <a:r>
                         <a:rPr lang="en-US" sz="1500" b="1">
                           <a:solidFill>
-                            <a:srgbClr val="000000"/>
+                            <a:srgbClr val="151515"/>
                           </a:solidFill>
                           <a:latin typeface="LG Smart UI Bold"/>
                           <a:ea typeface="LG Smart UI Bold"/>
@@ -12266,7 +12222,7 @@
                       <a:r>
                         <a:rPr lang="en-US" sz="1500">
                           <a:solidFill>
-                            <a:srgbClr val="000000"/>
+                            <a:srgbClr val="151515"/>
                           </a:solidFill>
                           <a:latin typeface="LG Smart UI Bold"/>
                           <a:ea typeface="LG Smart UI Bold"/>
@@ -12332,7 +12288,7 @@
                       <a:r>
                         <a:rPr lang="en-US" sz="1500">
                           <a:solidFill>
-                            <a:srgbClr val="000000"/>
+                            <a:srgbClr val="151515"/>
                           </a:solidFill>
                           <a:latin typeface="LG Smart UI Bold"/>
                           <a:ea typeface="LG Smart UI Bold"/>
@@ -12400,7 +12356,7 @@
                       <a:r>
                         <a:rPr lang="en-US" sz="1500" b="1">
                           <a:solidFill>
-                            <a:srgbClr val="000000"/>
+                            <a:srgbClr val="151515"/>
                           </a:solidFill>
                           <a:latin typeface="LG Smart UI Bold"/>
                           <a:ea typeface="LG Smart UI Bold"/>
@@ -12466,7 +12422,7 @@
                       <a:r>
                         <a:rPr lang="en-US" sz="1500">
                           <a:solidFill>
-                            <a:srgbClr val="000000"/>
+                            <a:srgbClr val="151515"/>
                           </a:solidFill>
                           <a:latin typeface="LG Smart UI Bold"/>
                           <a:ea typeface="LG Smart UI Bold"/>
@@ -12532,7 +12488,7 @@
                       <a:r>
                         <a:rPr lang="en-US" sz="1500">
                           <a:solidFill>
-                            <a:srgbClr val="000000"/>
+                            <a:srgbClr val="151515"/>
                           </a:solidFill>
                           <a:latin typeface="LG Smart UI Bold"/>
                           <a:ea typeface="LG Smart UI Bold"/>
@@ -12620,7 +12576,7 @@
             <a:r>
               <a:rPr lang="en-US" sz="1200" i="1">
                 <a:solidFill>
-                  <a:srgbClr val="151515"/>
+                  <a:srgbClr val="FFFFFF"/>
                 </a:solidFill>
                 <a:latin typeface="LG Smart UI Bold"/>
                 <a:ea typeface="LG Smart UI Bold"/>
@@ -12730,7 +12686,7 @@
         </p:nvSpPr>
         <p:spPr>
           <a:xfrm>
-            <a:off x="274320" y="228600"/>
+            <a:off x="182880" y="182880"/>
             <a:ext cx="4572000" cy="274320"/>
           </a:xfrm>
           <a:prstGeom prst="rect">
@@ -12764,7 +12720,7 @@
         </p:nvSpPr>
         <p:spPr>
           <a:xfrm>
-            <a:off x="7772400" y="228600"/>
+            <a:off x="7772400" y="182880"/>
             <a:ext cx="1097280" cy="274320"/>
           </a:xfrm>
           <a:prstGeom prst="rect">
@@ -13729,7 +13685,7 @@
         </p:nvSpPr>
         <p:spPr>
           <a:xfrm>
-            <a:off x="274320" y="228600"/>
+            <a:off x="182880" y="182880"/>
             <a:ext cx="4572000" cy="274320"/>
           </a:xfrm>
           <a:prstGeom prst="rect">
@@ -13763,7 +13719,7 @@
         </p:nvSpPr>
         <p:spPr>
           <a:xfrm>
-            <a:off x="7772400" y="228600"/>
+            <a:off x="7772400" y="182880"/>
             <a:ext cx="1097280" cy="274320"/>
           </a:xfrm>
           <a:prstGeom prst="rect">
@@ -14000,7 +13956,7 @@
             <a:r>
               <a:rPr lang="en-US" sz="1600" b="1">
                 <a:solidFill>
-                  <a:srgbClr val="FFFFFF"/>
+                  <a:srgbClr val="151515"/>
                 </a:solidFill>
                 <a:latin typeface="LG Smart UI Bold"/>
                 <a:ea typeface="LG Smart UI Bold"/>
@@ -14185,7 +14141,7 @@
             <a:r>
               <a:rPr lang="en-US" sz="1600" b="1">
                 <a:solidFill>
-                  <a:srgbClr val="FFFFFF"/>
+                  <a:srgbClr val="151515"/>
                 </a:solidFill>
                 <a:latin typeface="LG Smart UI Bold"/>
                 <a:ea typeface="LG Smart UI Bold"/>
@@ -14370,7 +14326,7 @@
             <a:r>
               <a:rPr lang="en-US" sz="1600" b="1">
                 <a:solidFill>
-                  <a:srgbClr val="FFFFFF"/>
+                  <a:srgbClr val="151515"/>
                 </a:solidFill>
                 <a:latin typeface="LG Smart UI Bold"/>
                 <a:ea typeface="LG Smart UI Bold"/>
@@ -14555,7 +14511,7 @@
             <a:r>
               <a:rPr lang="en-US" sz="1600" b="1">
                 <a:solidFill>
-                  <a:srgbClr val="FFFFFF"/>
+                  <a:srgbClr val="151515"/>
                 </a:solidFill>
                 <a:latin typeface="LG Smart UI Bold"/>
                 <a:ea typeface="LG Smart UI Bold"/>
@@ -14788,7 +14744,7 @@
         </p:nvSpPr>
         <p:spPr>
           <a:xfrm>
-            <a:off x="274320" y="228600"/>
+            <a:off x="182880" y="182880"/>
             <a:ext cx="4572000" cy="274320"/>
           </a:xfrm>
           <a:prstGeom prst="rect">
@@ -14822,7 +14778,7 @@
         </p:nvSpPr>
         <p:spPr>
           <a:xfrm>
-            <a:off x="7772400" y="228600"/>
+            <a:off x="7772400" y="182880"/>
             <a:ext cx="1097280" cy="274320"/>
           </a:xfrm>
           <a:prstGeom prst="rect">
@@ -15059,7 +15015,7 @@
             <a:r>
               <a:rPr lang="en-US" sz="1200">
                 <a:solidFill>
-                  <a:srgbClr val="FFFFFF"/>
+                  <a:srgbClr val="151515"/>
                 </a:solidFill>
                 <a:latin typeface="LG Smart UI Bold"/>
                 <a:ea typeface="LG Smart UI Bold"/>
@@ -15242,7 +15198,7 @@
             <a:r>
               <a:rPr lang="en-US" sz="1200">
                 <a:solidFill>
-                  <a:srgbClr val="FFFFFF"/>
+                  <a:srgbClr val="151515"/>
                 </a:solidFill>
                 <a:latin typeface="LG Smart UI Bold"/>
                 <a:ea typeface="LG Smart UI Bold"/>
@@ -15425,7 +15381,7 @@
             <a:r>
               <a:rPr lang="en-US" sz="1200">
                 <a:solidFill>
-                  <a:srgbClr val="FFFFFF"/>
+                  <a:srgbClr val="151515"/>
                 </a:solidFill>
                 <a:latin typeface="LG Smart UI Bold"/>
                 <a:ea typeface="LG Smart UI Bold"/>
@@ -15608,7 +15564,7 @@
             <a:r>
               <a:rPr lang="en-US" sz="1200">
                 <a:solidFill>
-                  <a:srgbClr val="FFFFFF"/>
+                  <a:srgbClr val="151515"/>
                 </a:solidFill>
                 <a:latin typeface="LG Smart UI Bold"/>
                 <a:ea typeface="LG Smart UI Bold"/>
@@ -15799,7 +15755,7 @@
         </p:nvSpPr>
         <p:spPr>
           <a:xfrm>
-            <a:off x="274320" y="228600"/>
+            <a:off x="182880" y="182880"/>
             <a:ext cx="4572000" cy="274320"/>
           </a:xfrm>
           <a:prstGeom prst="rect">
@@ -15833,7 +15789,7 @@
         </p:nvSpPr>
         <p:spPr>
           <a:xfrm>
-            <a:off x="7772400" y="228600"/>
+            <a:off x="7772400" y="182880"/>
             <a:ext cx="1097280" cy="274320"/>
           </a:xfrm>
           <a:prstGeom prst="rect">
